--- a/report/2026ESWContest_모빌리티_ARTS_개발완료보고서.pptx
+++ b/report/2026ESWContest_모빌리티_ARTS_개발완료보고서.pptx
@@ -8930,7 +8930,7 @@
                 </a:solidFill>
                 <a:latin typeface="맑은 고딕"/>
               </a:rPr>
-              <a:t>차선 안에서 멈췄다 — 스핀도 충돌도 없다</a:t>
+              <a:t>차선 안에서 멈췄다 — 가로 미끄러짐도 충돌도 없다</a:t>
             </a:r>
           </a:p>
         </p:txBody>
@@ -9977,7 +9977,7 @@
                 </a:solidFill>
                 <a:latin typeface="맑은 고딕"/>
               </a:rPr>
-              <a:t>차선 유지와 스핀을 가른다.</a:t>
+              <a:t>차선 유지와 제어 상실을 가른다.</a:t>
             </a:r>
           </a:p>
         </p:txBody>
@@ -10420,9 +10420,90 @@
           </a:p>
         </p:txBody>
       </p:sp>
+      <p:sp>
+        <p:nvSpPr>
+          <p:cNvPr id="9" name="Rectangle 8"/>
+          <p:cNvSpPr/>
+          <p:nvPr/>
+        </p:nvSpPr>
+        <p:spPr>
+          <a:xfrm>
+            <a:off x="533400" y="5943600"/>
+            <a:ext cx="11125200" cy="9525"/>
+          </a:xfrm>
+          <a:prstGeom prst="rect">
+            <a:avLst/>
+          </a:prstGeom>
+          <a:solidFill>
+            <a:srgbClr val="E2E8F0"/>
+          </a:solidFill>
+          <a:ln>
+            <a:noFill/>
+          </a:ln>
+          <a:effectLst/>
+        </p:spPr>
+        <p:style>
+          <a:lnRef idx="1">
+            <a:schemeClr val="accent1"/>
+          </a:lnRef>
+          <a:fillRef idx="3">
+            <a:schemeClr val="accent1"/>
+          </a:fillRef>
+          <a:effectRef idx="2">
+            <a:schemeClr val="accent1"/>
+          </a:effectRef>
+          <a:fontRef idx="minor">
+            <a:schemeClr val="lt1"/>
+          </a:fontRef>
+        </p:style>
+        <p:txBody>
+          <a:bodyPr rtlCol="0" anchor="ctr"/>
+          <a:lstStyle/>
+          <a:p/>
+        </p:txBody>
+      </p:sp>
+      <p:sp>
+        <p:nvSpPr>
+          <p:cNvPr id="10" name="TextBox 9"/>
+          <p:cNvSpPr txBox="1"/>
+          <p:nvPr/>
+        </p:nvSpPr>
+        <p:spPr>
+          <a:xfrm>
+            <a:off x="533400" y="6019800"/>
+            <a:ext cx="11125200" cy="323850"/>
+          </a:xfrm>
+          <a:prstGeom prst="rect">
+            <a:avLst/>
+          </a:prstGeom>
+          <a:noFill/>
+        </p:spPr>
+        <p:txBody>
+          <a:bodyPr wrap="square" anchor="t" lIns="0" rIns="0" tIns="0" bIns="0">
+            <a:spAutoFit/>
+          </a:bodyPr>
+          <a:lstStyle/>
+          <a:p>
+            <a:pPr algn="l">
+              <a:lnSpc>
+                <a:spcPct val="140000"/>
+              </a:lnSpc>
+            </a:pPr>
+            <a:r>
+              <a:rPr sz="860" b="0">
+                <a:solidFill>
+                  <a:srgbClr val="64748B"/>
+                </a:solidFill>
+                <a:latin typeface="맑은 고딕"/>
+              </a:rPr>
+              <a:t>'스핀'은 차선 대비 방향 오차가 86°를 넘은 순간으로 정의했다. 실측값은 −88.4°에서 −99.2° 사이로, 차체가 역방향을 본 것이 아니라 차로를 가로질러 돌아간 상태다. 주행별 이벤트는 docs/data/events/events_*_nodefense*.json 에 그대로 있다.</a:t>
+            </a:r>
+          </a:p>
+        </p:txBody>
+      </p:sp>
       <p:pic>
         <p:nvPicPr>
-          <p:cNvPr id="9" name="Picture 8" descr="base_spin_c.jpg"/>
+          <p:cNvPr id="11" name="Picture 10" descr="base_spin_c.jpg"/>
           <p:cNvPicPr>
             <a:picLocks noChangeAspect="1"/>
           </p:cNvPicPr>
@@ -10436,8 +10517,8 @@
         </p:blipFill>
         <p:spPr>
           <a:xfrm>
-            <a:off x="1575308" y="1200150"/>
-            <a:ext cx="4368800" cy="3276600"/>
+            <a:off x="1918208" y="1200150"/>
+            <a:ext cx="3683000" cy="2762250"/>
           </a:xfrm>
           <a:prstGeom prst="rect">
             <a:avLst/>
@@ -10451,13 +10532,13 @@
       </p:pic>
       <p:sp>
         <p:nvSpPr>
-          <p:cNvPr id="10" name="TextBox 9"/>
+          <p:cNvPr id="12" name="TextBox 11"/>
           <p:cNvSpPr txBox="1"/>
           <p:nvPr/>
         </p:nvSpPr>
         <p:spPr>
           <a:xfrm>
-            <a:off x="533400" y="4514850"/>
+            <a:off x="533400" y="4000500"/>
             <a:ext cx="6452616" cy="342900"/>
           </a:xfrm>
           <a:prstGeom prst="rect">
@@ -10483,7 +10564,7 @@
                 </a:solidFill>
                 <a:latin typeface="맑은 고딕"/>
               </a:rPr>
-              <a:t>차선 이탈 → 스핀</a:t>
+              <a:t>차선 이탈 → 가로 미끄러짐</a:t>
             </a:r>
             <a:r>
               <a:rPr sz="919" b="0">
@@ -10492,14 +10573,14 @@
                 </a:solidFill>
                 <a:latin typeface="맑은 고딕"/>
               </a:rPr>
-              <a:t>　12.02 s 이탈(횡오프셋 −1.45 m, 헤딩 오차 −41°) → 14.82 s 스핀(−99°). 차체가 차로를 가로질러 90° 가까이 돌아 있다</a:t>
+              <a:t>　12.02 s 이탈(횡오프셋 −1.45 m, 방향 오차 −41°) → 14.82 s 에 −99°. 차체가 차로를 가로질러 90° 가까이 돌아 있다</a:t>
             </a:r>
           </a:p>
         </p:txBody>
       </p:sp>
       <p:pic>
         <p:nvPicPr>
-          <p:cNvPr id="11" name="Picture 10" descr="base_wall_front.jpg"/>
+          <p:cNvPr id="13" name="Picture 12" descr="base_wall_front.jpg"/>
           <p:cNvPicPr>
             <a:picLocks noChangeAspect="1"/>
           </p:cNvPicPr>
@@ -10514,7 +10595,7 @@
         </p:blipFill>
         <p:spPr>
           <a:xfrm>
-            <a:off x="533400" y="5010150"/>
+            <a:off x="533400" y="4495800"/>
             <a:ext cx="6452616" cy="1047750"/>
           </a:xfrm>
           <a:prstGeom prst="rect">
@@ -10529,13 +10610,13 @@
       </p:pic>
       <p:sp>
         <p:nvSpPr>
-          <p:cNvPr id="12" name="TextBox 11"/>
+          <p:cNvPr id="14" name="TextBox 13"/>
           <p:cNvSpPr txBox="1"/>
           <p:nvPr/>
         </p:nvSpPr>
         <p:spPr>
           <a:xfrm>
-            <a:off x="533400" y="6096000"/>
+            <a:off x="533400" y="5581650"/>
             <a:ext cx="6452616" cy="266700"/>
           </a:xfrm>
           <a:prstGeom prst="rect">
@@ -10570,25 +10651,25 @@
                 </a:solidFill>
                 <a:latin typeface="맑은 고딕"/>
               </a:rPr>
-              <a:t>　11.42 s 이탈 → 12.22 s 스핀 → 12.32 s 에 12.0 km/h 로 벽에 충돌. 화면이 방호벽으로 가득 찼다</a:t>
-            </a:r>
-          </a:p>
-        </p:txBody>
-      </p:sp>
-      <p:sp>
-        <p:nvSpPr>
-          <p:cNvPr id="13" name="Rounded Rectangle 12"/>
+              <a:t>　11.42 s 이탈 → 12.22 s 에 −98° → 12.32 s 에 12.0 km/h 로 벽에 충돌. 화면이 방호벽으로 가득 찼다</a:t>
+            </a:r>
+          </a:p>
+        </p:txBody>
+      </p:sp>
+      <p:sp>
+        <p:nvSpPr>
+          <p:cNvPr id="15" name="Rounded Rectangle 14"/>
           <p:cNvSpPr/>
           <p:nvPr/>
         </p:nvSpPr>
         <p:spPr>
           <a:xfrm>
             <a:off x="7138416" y="1200150"/>
-            <a:ext cx="4520184" cy="1162050"/>
+            <a:ext cx="4520184" cy="1543050"/>
           </a:xfrm>
           <a:prstGeom prst="roundRect">
             <a:avLst>
-              <a:gd name="adj" fmla="val 5737"/>
+              <a:gd name="adj" fmla="val 4320"/>
             </a:avLst>
           </a:prstGeom>
           <a:solidFill>
@@ -10623,14 +10704,14 @@
       </p:sp>
       <p:sp>
         <p:nvSpPr>
-          <p:cNvPr id="14" name="Rectangle 13"/>
+          <p:cNvPr id="16" name="Rectangle 15"/>
           <p:cNvSpPr/>
           <p:nvPr/>
         </p:nvSpPr>
         <p:spPr>
           <a:xfrm>
             <a:off x="7138416" y="1200150"/>
-            <a:ext cx="38100" cy="1162050"/>
+            <a:ext cx="38100" cy="1543050"/>
           </a:xfrm>
           <a:prstGeom prst="rect">
             <a:avLst/>
@@ -10665,7 +10746,7 @@
       </p:sp>
       <p:sp>
         <p:nvSpPr>
-          <p:cNvPr id="15" name="TextBox 14"/>
+          <p:cNvPr id="17" name="TextBox 16"/>
           <p:cNvSpPr txBox="1"/>
           <p:nvPr/>
         </p:nvSpPr>
@@ -10704,14 +10785,14 @@
       </p:sp>
       <p:sp>
         <p:nvSpPr>
-          <p:cNvPr id="16" name="TextBox 15"/>
+          <p:cNvPr id="18" name="TextBox 17"/>
           <p:cNvSpPr txBox="1"/>
           <p:nvPr/>
         </p:nvSpPr>
         <p:spPr>
           <a:xfrm>
             <a:off x="7281291" y="1550194"/>
-            <a:ext cx="4253484" cy="735806"/>
+            <a:ext cx="4253484" cy="1116806"/>
           </a:xfrm>
           <a:prstGeom prst="rect">
             <a:avLst/>
@@ -10748,7 +10829,25 @@
                 </a:solidFill>
                 <a:latin typeface="맑은 고딕"/>
               </a:rPr>
-              <a:t> 차선을 이탈하고 스핀했다.</a:t>
+              <a:t> 차선을 벗어났고, 차체가 진행 방향과 </a:t>
+            </a:r>
+            <a:r>
+              <a:rPr sz="1150" b="1">
+                <a:solidFill>
+                  <a:srgbClr val="334155"/>
+                </a:solidFill>
+                <a:latin typeface="맑은 고딕"/>
+              </a:rPr>
+              <a:t>88~99° 어긋난 채</a:t>
+            </a:r>
+            <a:r>
+              <a:rPr sz="1150" b="0">
+                <a:solidFill>
+                  <a:srgbClr val="334155"/>
+                </a:solidFill>
+                <a:latin typeface="맑은 고딕"/>
+              </a:rPr>
+              <a:t> 가로로 미끄러졌다.</a:t>
             </a:r>
             <a:br/>
             <a:r>
@@ -10776,7 +10875,7 @@
                 </a:solidFill>
                 <a:latin typeface="맑은 고딕"/>
               </a:rPr>
-              <a:t>은 12~17 km/h 로 방호벽에 충돌했다.</a:t>
+              <a:t>은 12~17 km/h 로 방호벽에 부딪혔다.</a:t>
             </a:r>
             <a:br/>
             <a:r>
@@ -10804,25 +10903,25 @@
                 </a:solidFill>
                 <a:latin typeface="맑은 고딕"/>
               </a:rPr>
-              <a:t>은 충돌 전에 스핀으로 끝났다.</a:t>
-            </a:r>
-          </a:p>
-        </p:txBody>
-      </p:sp>
-      <p:sp>
-        <p:nvSpPr>
-          <p:cNvPr id="17" name="Rounded Rectangle 16"/>
+              <a:t>은 충돌 전에 미끄러짐으로 끝났다.</a:t>
+            </a:r>
+          </a:p>
+        </p:txBody>
+      </p:sp>
+      <p:sp>
+        <p:nvSpPr>
+          <p:cNvPr id="19" name="Rounded Rectangle 18"/>
           <p:cNvSpPr/>
           <p:nvPr/>
         </p:nvSpPr>
         <p:spPr>
           <a:xfrm>
-            <a:off x="7138416" y="2476500"/>
-            <a:ext cx="4520184" cy="3886200"/>
+            <a:off x="7138416" y="2857500"/>
+            <a:ext cx="4520184" cy="2990850"/>
           </a:xfrm>
           <a:prstGeom prst="roundRect">
             <a:avLst>
-              <a:gd name="adj" fmla="val 1715"/>
+              <a:gd name="adj" fmla="val 2229"/>
             </a:avLst>
           </a:prstGeom>
           <a:solidFill>
@@ -10857,14 +10956,14 @@
       </p:sp>
       <p:sp>
         <p:nvSpPr>
-          <p:cNvPr id="18" name="Rectangle 17"/>
+          <p:cNvPr id="20" name="Rectangle 19"/>
           <p:cNvSpPr/>
           <p:nvPr/>
         </p:nvSpPr>
         <p:spPr>
           <a:xfrm>
-            <a:off x="7138416" y="2476500"/>
-            <a:ext cx="38100" cy="3886200"/>
+            <a:off x="7138416" y="2857500"/>
+            <a:ext cx="38100" cy="2990850"/>
           </a:xfrm>
           <a:prstGeom prst="rect">
             <a:avLst/>
@@ -10899,13 +10998,13 @@
       </p:sp>
       <p:sp>
         <p:nvSpPr>
-          <p:cNvPr id="19" name="TextBox 18"/>
+          <p:cNvPr id="21" name="TextBox 20"/>
           <p:cNvSpPr txBox="1"/>
           <p:nvPr/>
         </p:nvSpPr>
         <p:spPr>
           <a:xfrm>
-            <a:off x="7281291" y="2571750"/>
+            <a:off x="7281291" y="2952750"/>
             <a:ext cx="4253484" cy="190500"/>
           </a:xfrm>
           <a:prstGeom prst="rect">
@@ -10938,14 +11037,14 @@
       </p:sp>
       <p:sp>
         <p:nvSpPr>
-          <p:cNvPr id="20" name="TextBox 19"/>
+          <p:cNvPr id="22" name="TextBox 21"/>
           <p:cNvSpPr txBox="1"/>
           <p:nvPr/>
         </p:nvSpPr>
         <p:spPr>
           <a:xfrm>
-            <a:off x="7281291" y="2826544"/>
-            <a:ext cx="4253484" cy="3459956"/>
+            <a:off x="7281291" y="3207544"/>
+            <a:ext cx="4253484" cy="2564606"/>
           </a:xfrm>
           <a:prstGeom prst="rect">
             <a:avLst/>
@@ -11010,7 +11109,7 @@
                 </a:solidFill>
                 <a:latin typeface="맑은 고딕"/>
               </a:rPr>
-              <a:t>스핀·차선 이탈이 확정되면 자율주행을 떼고 관성에 맡기며, 정지·충돌하거나 4초가 지나면 주행을 끝낸다.</a:t>
+              <a:t>그래서 차선 이탈이 확정되면 자율주행을 떼고 관성에 맡기며, 정지하거나 충돌하거나 4초가 지나면 주행을 끝낸다.</a:t>
             </a:r>
           </a:p>
           <a:p>
@@ -11023,13 +11122,22 @@
               </a:spcAft>
             </a:pPr>
             <a:r>
+              <a:rPr sz="1030" b="0">
+                <a:solidFill>
+                  <a:srgbClr val="334155"/>
+                </a:solidFill>
+                <a:latin typeface="맑은 고딕"/>
+              </a:rPr>
+              <a:t>실제 운전자는 제동을 시도하므로, 기준선의 결과는 </a:t>
+            </a:r>
+            <a:r>
               <a:rPr sz="1030" b="1">
                 <a:solidFill>
                   <a:srgbClr val="334155"/>
                 </a:solidFill>
                 <a:latin typeface="맑은 고딕"/>
               </a:rPr>
-              <a:t>자율주행을 그대로 두면</a:t>
+              <a:t>'아무 보조도 없을 때의 물리적 귀결'</a:t>
             </a:r>
             <a:r>
               <a:rPr sz="1030" b="0">
@@ -11038,7 +11146,7 @@
                 </a:solidFill>
                 <a:latin typeface="맑은 고딕"/>
               </a:rPr>
-              <a:t> 스핀으로 역방향을 본 차가 다시 가속해 빙판으로 유턴해 들어갔다. 그때 난 충돌은 빙판이 아니라 역주행 탓이라 근거가 될 수 없었다.</a:t>
+              <a:t>로 읽어야 한다.</a:t>
             </a:r>
           </a:p>
         </p:txBody>

--- a/report/2026ESWContest_모빌리티_ARTS_개발완료보고서.pptx
+++ b/report/2026ESWContest_모빌리티_ARTS_개발완료보고서.pptx
@@ -7201,7 +7201,7 @@
                 </a:solidFill>
                 <a:latin typeface="맑은 고딕"/>
               </a:rPr>
-              <a:t>C 코어(fw/npu_lib/slip_core.h)는 HAL·OS 비의존이라 호스트에서도 컴파일된다. 파이썬 참조 구현과 같은 판정을 내리는지 매 커밋 검증한다.</a:t>
+              <a:t>C 코어(sw/fw/npu_lib/slip_core.h)는 HAL·OS 비의존이라 호스트에서도 컴파일된다. 파이썬 참조 구현과 같은 판정을 내리는지 매 커밋 검증한다.</a:t>
             </a:r>
           </a:p>
         </p:txBody>
@@ -12290,7 +12290,7 @@
                 </a:solidFill>
                 <a:latin typeface="맑은 고딕"/>
               </a:rPr>
-              <a:t>주행 108회 전체의 이벤트 JSON 을 저장소에 함께 올렸다. CARLA 도 보드도 없이 scripts/analysis/summarize_runs.py 만으로 집계표를 재생성할 수 있다 — 손으로 적은 숫자가 아니라는 증명이다.</a:t>
+              <a:t>주행 108회 전체의 이벤트 JSON 을 저장소에 함께 올렸다. CARLA 도 보드도 없이 sw/scripts/analysis/summarize_runs.py 만으로 집계표를 재생성할 수 있다 — 손으로 적은 숫자가 아니라는 증명이다.</a:t>
             </a:r>
           </a:p>
         </p:txBody>
@@ -16075,7 +16075,7 @@
                 </a:solidFill>
                 <a:latin typeface="Consolas"/>
               </a:rPr>
-              <a:t>python3 scripts/analysis/summarize_runs.py</a:t>
+              <a:t>python3 sw/scripts/analysis/summarize_runs.py</a:t>
             </a:r>
             <a:r>
               <a:rPr sz="860" b="0">
@@ -16125,7 +16125,7 @@
                 </a:solidFill>
                 <a:latin typeface="Consolas"/>
               </a:rPr>
-              <a:t>python3 fw/npu_lib/test_slip_core.py</a:t>
+              <a:t>python3 sw/fw/npu_lib/test_slip_core.py</a:t>
             </a:r>
             <a:r>
               <a:rPr sz="860" b="0">
@@ -18830,7 +18830,7 @@
       </p:sp>
       <p:pic>
         <p:nvPicPr>
-          <p:cNvPr id="8" name="Picture 7" descr="hw_pi_stack.jpg"/>
+          <p:cNvPr id="8" name="Picture 7" descr="hw_n6.jpg"/>
           <p:cNvPicPr>
             <a:picLocks noChangeAspect="1"/>
           </p:cNvPicPr>
@@ -18838,7 +18838,7 @@
         </p:nvPicPr>
         <p:blipFill>
           <a:blip r:embed="rId2"/>
-          <a:srcRect t="18913" b="18913"/>
+          <a:srcRect t="1366" b="1366"/>
           <a:stretch>
             <a:fillRect/>
           </a:stretch>
@@ -18846,7 +18846,7 @@
         <p:spPr>
           <a:xfrm>
             <a:off x="533400" y="933450"/>
-            <a:ext cx="2702719" cy="2228850"/>
+            <a:ext cx="2702719" cy="2628900"/>
           </a:xfrm>
           <a:prstGeom prst="rect">
             <a:avLst/>
@@ -18866,8 +18866,8 @@
         </p:nvSpPr>
         <p:spPr>
           <a:xfrm>
-            <a:off x="533400" y="3200400"/>
-            <a:ext cx="2702719" cy="285750"/>
+            <a:off x="533400" y="3600450"/>
+            <a:ext cx="2702719" cy="419100"/>
           </a:xfrm>
           <a:prstGeom prst="rect">
             <a:avLst/>
@@ -18886,13 +18886,22 @@
               </a:lnSpc>
             </a:pPr>
             <a:r>
+              <a:rPr sz="919" b="1">
+                <a:solidFill>
+                  <a:srgbClr val="64748B"/>
+                </a:solidFill>
+                <a:latin typeface="맑은 고딕"/>
+              </a:rPr>
+              <a:t>STM32N6570-DK</a:t>
+            </a:r>
+            <a:r>
               <a:rPr sz="919" b="0">
                 <a:solidFill>
                   <a:srgbClr val="64748B"/>
                 </a:solidFill>
                 <a:latin typeface="맑은 고딕"/>
               </a:rPr>
-              <a:t>Pi 5 16 GB + AI HAT+ 2 (Hailo-10H)</a:t>
+              <a:t> + AI 카메라 MB1854B</a:t>
             </a:r>
             <a:br/>
             <a:r>
@@ -18902,14 +18911,14 @@
                 </a:solidFill>
                 <a:latin typeface="맑은 고딕"/>
               </a:rPr>
-              <a:t>KKSB 케이스 · 액티브 쿨러</a:t>
+              <a:t>왼쪽은 보조배터리, 위는 NVMe SSD</a:t>
             </a:r>
           </a:p>
         </p:txBody>
       </p:sp>
       <p:pic>
         <p:nvPicPr>
-          <p:cNvPr id="10" name="Picture 9" descr="hw_d435i_nvme.jpg"/>
+          <p:cNvPr id="10" name="Picture 9" descr="hw_pi_stack.jpg"/>
           <p:cNvPicPr>
             <a:picLocks noChangeAspect="1"/>
           </p:cNvPicPr>
@@ -18917,7 +18926,7 @@
         </p:nvPicPr>
         <p:blipFill>
           <a:blip r:embed="rId3"/>
-          <a:srcRect t="18697" b="18697"/>
+          <a:srcRect t="13333" b="13333"/>
           <a:stretch>
             <a:fillRect/>
           </a:stretch>
@@ -18925,7 +18934,7 @@
         <p:spPr>
           <a:xfrm>
             <a:off x="3340894" y="933450"/>
-            <a:ext cx="2702719" cy="2228850"/>
+            <a:ext cx="2702719" cy="2628900"/>
           </a:xfrm>
           <a:prstGeom prst="rect">
             <a:avLst/>
@@ -18945,8 +18954,8 @@
         </p:nvSpPr>
         <p:spPr>
           <a:xfrm>
-            <a:off x="3340894" y="3200400"/>
-            <a:ext cx="2702719" cy="285750"/>
+            <a:off x="3340894" y="3600450"/>
+            <a:ext cx="2702719" cy="419100"/>
           </a:xfrm>
           <a:prstGeom prst="rect">
             <a:avLst/>
@@ -18965,30 +18974,30 @@
               </a:lnSpc>
             </a:pPr>
             <a:r>
+              <a:rPr sz="919" b="1">
+                <a:solidFill>
+                  <a:srgbClr val="64748B"/>
+                </a:solidFill>
+                <a:latin typeface="맑은 고딕"/>
+              </a:rPr>
+              <a:t>Raspberry Pi 5 16 GB + AI HAT+ 2</a:t>
+            </a:r>
+            <a:br/>
+            <a:r>
               <a:rPr sz="919" b="0">
                 <a:solidFill>
                   <a:srgbClr val="64748B"/>
                 </a:solidFill>
                 <a:latin typeface="맑은 고딕"/>
               </a:rPr>
-              <a:t>RealSense D435i (RGB·뎁스·IMU)</a:t>
-            </a:r>
-            <a:br/>
-            <a:r>
-              <a:rPr sz="919" b="0">
-                <a:solidFill>
-                  <a:srgbClr val="64748B"/>
-                </a:solidFill>
-                <a:latin typeface="맑은 고딕"/>
-              </a:rPr>
-              <a:t>NVMe 1 TB 외장</a:t>
+              <a:t>KKSB 케이스 · 액티브 쿨러</a:t>
             </a:r>
           </a:p>
         </p:txBody>
       </p:sp>
       <p:pic>
         <p:nvPicPr>
-          <p:cNvPr id="12" name="Picture 11" descr="hw_boot.jpg"/>
+          <p:cNvPr id="12" name="Picture 11" descr="hw_d435i_nvme.jpg"/>
           <p:cNvPicPr>
             <a:picLocks noChangeAspect="1"/>
           </p:cNvPicPr>
@@ -18996,7 +19005,7 @@
         </p:nvPicPr>
         <p:blipFill>
           <a:blip r:embed="rId4"/>
-          <a:srcRect t="18913" b="18913"/>
+          <a:srcRect t="13079" b="13079"/>
           <a:stretch>
             <a:fillRect/>
           </a:stretch>
@@ -19004,7 +19013,7 @@
         <p:spPr>
           <a:xfrm>
             <a:off x="6148388" y="933450"/>
-            <a:ext cx="2702719" cy="2228850"/>
+            <a:ext cx="2702719" cy="2628900"/>
           </a:xfrm>
           <a:prstGeom prst="rect">
             <a:avLst/>
@@ -19024,8 +19033,8 @@
         </p:nvSpPr>
         <p:spPr>
           <a:xfrm>
-            <a:off x="6148388" y="3200400"/>
-            <a:ext cx="2702719" cy="285750"/>
+            <a:off x="6148388" y="3600450"/>
+            <a:ext cx="2702719" cy="419100"/>
           </a:xfrm>
           <a:prstGeom prst="rect">
             <a:avLst/>
@@ -19044,20 +19053,39 @@
               </a:lnSpc>
             </a:pPr>
             <a:r>
+              <a:rPr sz="919" b="1">
+                <a:solidFill>
+                  <a:srgbClr val="64748B"/>
+                </a:solidFill>
+                <a:latin typeface="맑은 고딕"/>
+              </a:rPr>
+              <a:t>RealSense D435i</a:t>
+            </a:r>
+            <a:r>
               <a:rPr sz="919" b="0">
                 <a:solidFill>
                   <a:srgbClr val="64748B"/>
                 </a:solidFill>
                 <a:latin typeface="맑은 고딕"/>
               </a:rPr>
-              <a:t>Raspberry Pi OS 부팅 · 브링업 확인</a:t>
+              <a:t> (RGB·뎁스·IMU)</a:t>
+            </a:r>
+            <a:br/>
+            <a:r>
+              <a:rPr sz="919" b="0">
+                <a:solidFill>
+                  <a:srgbClr val="64748B"/>
+                </a:solidFill>
+                <a:latin typeface="맑은 고딕"/>
+              </a:rPr>
+              <a:t>NVMe 1 TB SSD 외장</a:t>
             </a:r>
           </a:p>
         </p:txBody>
       </p:sp>
       <p:pic>
         <p:nvPicPr>
-          <p:cNvPr id="14" name="Picture 13" descr="p2_slip_c.jpg"/>
+          <p:cNvPr id="14" name="Picture 13" descr="hw_moza.jpg"/>
           <p:cNvPicPr>
             <a:picLocks noChangeAspect="1"/>
           </p:cNvPicPr>
@@ -19065,7 +19093,7 @@
         </p:nvPicPr>
         <p:blipFill>
           <a:blip r:embed="rId5"/>
-          <a:srcRect l="4527" r="4527"/>
+          <a:srcRect t="1366" b="1366"/>
           <a:stretch>
             <a:fillRect/>
           </a:stretch>
@@ -19073,7 +19101,7 @@
         <p:spPr>
           <a:xfrm>
             <a:off x="8955881" y="933450"/>
-            <a:ext cx="2702719" cy="2228850"/>
+            <a:ext cx="2702719" cy="2628900"/>
           </a:xfrm>
           <a:prstGeom prst="rect">
             <a:avLst/>
@@ -19093,8 +19121,8 @@
         </p:nvSpPr>
         <p:spPr>
           <a:xfrm>
-            <a:off x="8955881" y="3200400"/>
-            <a:ext cx="2702719" cy="285750"/>
+            <a:off x="8955881" y="3600450"/>
+            <a:ext cx="2702719" cy="419100"/>
           </a:xfrm>
           <a:prstGeom prst="rect">
             <a:avLst/>
@@ -19113,13 +19141,22 @@
               </a:lnSpc>
             </a:pPr>
             <a:r>
+              <a:rPr sz="919" b="1">
+                <a:solidFill>
+                  <a:srgbClr val="64748B"/>
+                </a:solidFill>
+                <a:latin typeface="맑은 고딕"/>
+              </a:rPr>
+              <a:t>Moza 휠 · 페달</a:t>
+            </a:r>
+            <a:r>
               <a:rPr sz="919" b="0">
                 <a:solidFill>
                   <a:srgbClr val="64748B"/>
                 </a:solidFill>
                 <a:latin typeface="맑은 고딕"/>
               </a:rPr>
-              <a:t>HIL 주행 — 보드가 판정하고 CARLA 가 물리를 돌린다</a:t>
+              <a:t> — 사람이 직접 CARLA 를 운전하는 경로</a:t>
             </a:r>
           </a:p>
         </p:txBody>
@@ -19133,8 +19170,8 @@
           <p:nvPr/>
         </p:nvGraphicFramePr>
         <p:xfrm>
-          <a:off x="533400" y="3638550"/>
-          <a:ext cx="11125200" cy="1295400"/>
+          <a:off x="533400" y="4191000"/>
+          <a:ext cx="11125200" cy="1752600"/>
         </p:xfrm>
         <a:graphic>
           <a:graphicData uri="http://schemas.openxmlformats.org/drawingml/2006/table">
@@ -19143,8 +19180,9 @@
                 <a:tableStyleId>{5C22544A-7EE6-4342-B048-85BDC9FD1C3A}</a:tableStyleId>
               </a:tblPr>
               <a:tblGrid>
-                <a:gridCol w="2587256"/>
-                <a:gridCol w="8537944"/>
+                <a:gridCol w="1150883"/>
+                <a:gridCol w="3836276"/>
+                <a:gridCol w="6138041"/>
               </a:tblGrid>
               <a:tr h="228600">
                 <a:tc>
@@ -19158,13 +19196,13 @@
                         </a:lnSpc>
                       </a:pPr>
                       <a:r>
-                        <a:rPr sz="1000" b="1">
+                        <a:rPr sz="969" b="1">
                           <a:solidFill>
                             <a:srgbClr val="FFFFFF"/>
                           </a:solidFill>
                           <a:latin typeface="맑은 고딕"/>
                         </a:rPr>
-                        <a:t>구성</a:t>
+                        <a:t>구분</a:t>
                       </a:r>
                     </a:p>
                   </a:txBody>
@@ -19185,7 +19223,34 @@
                         </a:lnSpc>
                       </a:pPr>
                       <a:r>
-                        <a:rPr sz="1000" b="1">
+                        <a:rPr sz="969" b="1">
+                          <a:solidFill>
+                            <a:srgbClr val="FFFFFF"/>
+                          </a:solidFill>
+                          <a:latin typeface="맑은 고딕"/>
+                        </a:rPr>
+                        <a:t>정식 명칭</a:t>
+                      </a:r>
+                    </a:p>
+                  </a:txBody>
+                  <a:tcPr marL="85725" marR="66675" marT="28575" marB="28575" anchor="ctr">
+                    <a:solidFill>
+                      <a:srgbClr val="1E293B"/>
+                    </a:solidFill>
+                  </a:tcPr>
+                </a:tc>
+                <a:tc>
+                  <a:txBody>
+                    <a:bodyPr wrap="square"/>
+                    <a:lstStyle/>
+                    <a:p>
+                      <a:pPr>
+                        <a:lnSpc>
+                          <a:spcPct val="128000"/>
+                        </a:lnSpc>
+                      </a:pPr>
+                      <a:r>
+                        <a:rPr sz="969" b="1">
                           <a:solidFill>
                             <a:srgbClr val="FFFFFF"/>
                           </a:solidFill>
@@ -19202,7 +19267,7 @@
                   </a:tcPr>
                 </a:tc>
               </a:tr>
-              <a:tr h="266700">
+              <a:tr h="304800">
                 <a:tc>
                   <a:txBody>
                     <a:bodyPr wrap="square"/>
@@ -19214,13 +19279,13 @@
                         </a:lnSpc>
                       </a:pPr>
                       <a:r>
-                        <a:rPr sz="1050" b="1">
+                        <a:rPr sz="1019" b="0">
                           <a:solidFill>
                             <a:srgbClr val="0F172A"/>
                           </a:solidFill>
                           <a:latin typeface="맑은 고딕"/>
                         </a:rPr>
-                        <a:t>STM32N6570-DK</a:t>
+                        <a:t>메인 보드</a:t>
                       </a:r>
                     </a:p>
                   </a:txBody>
@@ -19241,7 +19306,43 @@
                         </a:lnSpc>
                       </a:pPr>
                       <a:r>
-                        <a:rPr sz="1050" b="0">
+                        <a:rPr sz="1019" b="1">
+                          <a:solidFill>
+                            <a:srgbClr val="0F172A"/>
+                          </a:solidFill>
+                          <a:latin typeface="맑은 고딕"/>
+                        </a:rPr>
+                        <a:t>STM32N6570-DK</a:t>
+                      </a:r>
+                      <a:r>
+                        <a:rPr sz="1019" b="0">
+                          <a:solidFill>
+                            <a:srgbClr val="0F172A"/>
+                          </a:solidFill>
+                          <a:latin typeface="맑은 고딕"/>
+                        </a:rPr>
+                        <a:t> (MB1939-N6570-C02 + MB1860B)</a:t>
+                      </a:r>
+                    </a:p>
+                  </a:txBody>
+                  <a:tcPr marL="85725" marR="66675" marT="28575" marB="28575" anchor="ctr">
+                    <a:solidFill>
+                      <a:srgbClr val="FFFFFF"/>
+                    </a:solidFill>
+                  </a:tcPr>
+                </a:tc>
+                <a:tc>
+                  <a:txBody>
+                    <a:bodyPr wrap="square"/>
+                    <a:lstStyle/>
+                    <a:p>
+                      <a:pPr>
+                        <a:lnSpc>
+                          <a:spcPct val="128000"/>
+                        </a:lnSpc>
+                      </a:pPr>
+                      <a:r>
+                        <a:rPr sz="1019" b="0">
                           <a:solidFill>
                             <a:srgbClr val="0F172A"/>
                           </a:solidFill>
@@ -19250,7 +19351,7 @@
                         <a:t>1차 NPU 추론(Neural-ART @ 1 GHz) + 2차 ThreadX 실시간 판정·제어. </a:t>
                       </a:r>
                       <a:r>
-                        <a:rPr sz="1050" b="1">
+                        <a:rPr sz="1019" b="1">
                           <a:solidFill>
                             <a:srgbClr val="0F172A"/>
                           </a:solidFill>
@@ -19267,7 +19368,7 @@
                   </a:tcPr>
                 </a:tc>
               </a:tr>
-              <a:tr h="266700">
+              <a:tr h="304800">
                 <a:tc>
                   <a:txBody>
                     <a:bodyPr wrap="square"/>
@@ -19279,13 +19380,13 @@
                         </a:lnSpc>
                       </a:pPr>
                       <a:r>
-                        <a:rPr sz="1050" b="1">
+                        <a:rPr sz="1019" b="0">
                           <a:solidFill>
                             <a:srgbClr val="0F172A"/>
                           </a:solidFill>
                           <a:latin typeface="맑은 고딕"/>
                         </a:rPr>
-                        <a:t>Raspberry Pi 5 16 GB + AI HAT+ 2</a:t>
+                        <a:t>카메라</a:t>
                       </a:r>
                     </a:p>
                   </a:txBody>
@@ -19306,13 +19407,13 @@
                         </a:lnSpc>
                       </a:pPr>
                       <a:r>
-                        <a:rPr sz="1050" b="0">
+                        <a:rPr sz="1019" b="1">
                           <a:solidFill>
                             <a:srgbClr val="0F172A"/>
                           </a:solidFill>
                           <a:latin typeface="맑은 고딕"/>
                         </a:rPr>
-                        <a:t>호스트. 기상 맥락 생성, ZMQ 통신 브리지, 교차 검증용 NPU (대회 필수 보드)</a:t>
+                        <a:t>ST AI Camera module MB1854B</a:t>
                       </a:r>
                     </a:p>
                   </a:txBody>
@@ -19322,8 +19423,6 @@
                     </a:solidFill>
                   </a:tcPr>
                 </a:tc>
-              </a:tr>
-              <a:tr h="266700">
                 <a:tc>
                   <a:txBody>
                     <a:bodyPr wrap="square"/>
@@ -19335,13 +19434,42 @@
                         </a:lnSpc>
                       </a:pPr>
                       <a:r>
-                        <a:rPr sz="1050" b="1">
+                        <a:rPr sz="1019" b="0">
                           <a:solidFill>
                             <a:srgbClr val="0F172A"/>
                           </a:solidFill>
                           <a:latin typeface="맑은 고딕"/>
                         </a:rPr>
-                        <a:t>RealSense D435i</a:t>
+                        <a:t>1차 방어 입력. 보드에 직결되어 NPU 로 바로 들어간다</a:t>
+                      </a:r>
+                    </a:p>
+                  </a:txBody>
+                  <a:tcPr marL="85725" marR="66675" marT="28575" marB="28575" anchor="ctr">
+                    <a:solidFill>
+                      <a:srgbClr val="F1F5F9"/>
+                    </a:solidFill>
+                  </a:tcPr>
+                </a:tc>
+              </a:tr>
+              <a:tr h="304800">
+                <a:tc>
+                  <a:txBody>
+                    <a:bodyPr wrap="square"/>
+                    <a:lstStyle/>
+                    <a:p>
+                      <a:pPr>
+                        <a:lnSpc>
+                          <a:spcPct val="128000"/>
+                        </a:lnSpc>
+                      </a:pPr>
+                      <a:r>
+                        <a:rPr sz="1019" b="0">
+                          <a:solidFill>
+                            <a:srgbClr val="0F172A"/>
+                          </a:solidFill>
+                          <a:latin typeface="맑은 고딕"/>
+                        </a:rPr>
+                        <a:t>호스트</a:t>
                       </a:r>
                     </a:p>
                   </a:txBody>
@@ -19362,13 +19490,13 @@
                         </a:lnSpc>
                       </a:pPr>
                       <a:r>
-                        <a:rPr sz="1050" b="0">
+                        <a:rPr sz="1019" b="1">
                           <a:solidFill>
                             <a:srgbClr val="0F172A"/>
                           </a:solidFill>
                           <a:latin typeface="맑은 고딕"/>
                         </a:rPr>
-                        <a:t>RGB · 뎁스 · IMU. 실측 노이즈 특성 확보용</a:t>
+                        <a:t>Raspberry Pi 5 16 GB + AI HAT+ 2 (Hailo-10H)</a:t>
                       </a:r>
                     </a:p>
                   </a:txBody>
@@ -19378,8 +19506,6 @@
                     </a:solidFill>
                   </a:tcPr>
                 </a:tc>
-              </a:tr>
-              <a:tr h="266700">
                 <a:tc>
                   <a:txBody>
                     <a:bodyPr wrap="square"/>
@@ -19391,13 +19517,42 @@
                         </a:lnSpc>
                       </a:pPr>
                       <a:r>
-                        <a:rPr sz="1050" b="1">
+                        <a:rPr sz="1019" b="0">
                           <a:solidFill>
                             <a:srgbClr val="0F172A"/>
                           </a:solidFill>
                           <a:latin typeface="맑은 고딕"/>
                         </a:rPr>
-                        <a:t>RTX 5090 워크스테이션</a:t>
+                        <a:t>기상 맥락 생성, ZMQ 브리지, 교차 검증용 NPU (대회 필수 보드)</a:t>
+                      </a:r>
+                    </a:p>
+                  </a:txBody>
+                  <a:tcPr marL="85725" marR="66675" marT="28575" marB="28575" anchor="ctr">
+                    <a:solidFill>
+                      <a:srgbClr val="FFFFFF"/>
+                    </a:solidFill>
+                  </a:tcPr>
+                </a:tc>
+              </a:tr>
+              <a:tr h="304800">
+                <a:tc>
+                  <a:txBody>
+                    <a:bodyPr wrap="square"/>
+                    <a:lstStyle/>
+                    <a:p>
+                      <a:pPr>
+                        <a:lnSpc>
+                          <a:spcPct val="128000"/>
+                        </a:lnSpc>
+                      </a:pPr>
+                      <a:r>
+                        <a:rPr sz="1019" b="0">
+                          <a:solidFill>
+                            <a:srgbClr val="0F172A"/>
+                          </a:solidFill>
+                          <a:latin typeface="맑은 고딕"/>
+                        </a:rPr>
+                        <a:t>저장·전원</a:t>
                       </a:r>
                     </a:p>
                   </a:txBody>
@@ -19418,19 +19573,129 @@
                         </a:lnSpc>
                       </a:pPr>
                       <a:r>
-                        <a:rPr sz="1050" b="0">
+                        <a:rPr sz="1019" b="1">
                           <a:solidFill>
                             <a:srgbClr val="0F172A"/>
                           </a:solidFill>
                           <a:latin typeface="맑은 고딕"/>
                         </a:rPr>
-                        <a:t>CARLA 0.9.16 — HIL 환경의 물리·센서 제공</a:t>
+                        <a:t>NVMe 1 TB SSD 외장 · 보조배터리</a:t>
                       </a:r>
                     </a:p>
                   </a:txBody>
                   <a:tcPr marL="85725" marR="66675" marT="28575" marB="28575" anchor="ctr">
                     <a:solidFill>
                       <a:srgbClr val="F1F5F9"/>
+                    </a:solidFill>
+                  </a:tcPr>
+                </a:tc>
+                <a:tc>
+                  <a:txBody>
+                    <a:bodyPr wrap="square"/>
+                    <a:lstStyle/>
+                    <a:p>
+                      <a:pPr>
+                        <a:lnSpc>
+                          <a:spcPct val="128000"/>
+                        </a:lnSpc>
+                      </a:pPr>
+                      <a:r>
+                        <a:rPr sz="1019" b="0">
+                          <a:solidFill>
+                            <a:srgbClr val="0F172A"/>
+                          </a:solidFill>
+                          <a:latin typeface="맑은 고딕"/>
+                        </a:rPr>
+                        <a:t>데이터셋·주행 로그 적재 / 콘센트 없이 같은 구성을 돌리기 위한 것</a:t>
+                      </a:r>
+                    </a:p>
+                  </a:txBody>
+                  <a:tcPr marL="85725" marR="66675" marT="28575" marB="28575" anchor="ctr">
+                    <a:solidFill>
+                      <a:srgbClr val="F1F5F9"/>
+                    </a:solidFill>
+                  </a:tcPr>
+                </a:tc>
+              </a:tr>
+              <a:tr h="304800">
+                <a:tc>
+                  <a:txBody>
+                    <a:bodyPr wrap="square"/>
+                    <a:lstStyle/>
+                    <a:p>
+                      <a:pPr>
+                        <a:lnSpc>
+                          <a:spcPct val="128000"/>
+                        </a:lnSpc>
+                      </a:pPr>
+                      <a:r>
+                        <a:rPr sz="1019" b="0">
+                          <a:solidFill>
+                            <a:srgbClr val="0F172A"/>
+                          </a:solidFill>
+                          <a:latin typeface="맑은 고딕"/>
+                        </a:rPr>
+                        <a:t>센서·렌더</a:t>
+                      </a:r>
+                    </a:p>
+                  </a:txBody>
+                  <a:tcPr marL="85725" marR="66675" marT="28575" marB="28575" anchor="ctr">
+                    <a:solidFill>
+                      <a:srgbClr val="FFFFFF"/>
+                    </a:solidFill>
+                  </a:tcPr>
+                </a:tc>
+                <a:tc>
+                  <a:txBody>
+                    <a:bodyPr wrap="square"/>
+                    <a:lstStyle/>
+                    <a:p>
+                      <a:pPr>
+                        <a:lnSpc>
+                          <a:spcPct val="128000"/>
+                        </a:lnSpc>
+                      </a:pPr>
+                      <a:r>
+                        <a:rPr sz="1019" b="1">
+                          <a:solidFill>
+                            <a:srgbClr val="0F172A"/>
+                          </a:solidFill>
+                          <a:latin typeface="맑은 고딕"/>
+                        </a:rPr>
+                        <a:t>Intel RealSense D435i · RTX 5090</a:t>
+                      </a:r>
+                    </a:p>
+                  </a:txBody>
+                  <a:tcPr marL="85725" marR="66675" marT="28575" marB="28575" anchor="ctr">
+                    <a:solidFill>
+                      <a:srgbClr val="FFFFFF"/>
+                    </a:solidFill>
+                  </a:tcPr>
+                </a:tc>
+                <a:tc>
+                  <a:txBody>
+                    <a:bodyPr wrap="square"/>
+                    <a:lstStyle/>
+                    <a:p>
+                      <a:pPr>
+                        <a:lnSpc>
+                          <a:spcPct val="128000"/>
+                        </a:lnSpc>
+                      </a:pPr>
+                      <a:r>
+                        <a:rPr sz="1019" b="0">
+                          <a:solidFill>
+                            <a:srgbClr val="0F172A"/>
+                          </a:solidFill>
+                          <a:latin typeface="맑은 고딕"/>
+                        </a:rPr>
+                        <a:t>실측 IMU 노이즈 확보 / CARLA 0.9.16 물리·센서 제공</a:t>
+                      </a:r>
+                    </a:p>
+                  </a:txBody>
+                  <a:tcPr marL="85725" marR="66675" marT="28575" marB="28575" anchor="ctr">
+                    <a:solidFill>
+                      <a:srgbClr val="FFFFFF"/>
                     </a:solidFill>
                   </a:tcPr>
                 </a:tc>
